--- a/assets/pptx/catalog-337.pptx
+++ b/assets/pptx/catalog-337.pptx
@@ -3677,7 +3677,7 @@
                 <a:ea typeface="Ebrima"/>
                 <a:cs typeface="Ebrima"/>
               </a:rPr>
-              <a:t>(2x)</a:t>
+              <a:t>2x</a:t>
             </a:r>
           </a:p>
         </p:txBody>
@@ -3744,7 +3744,7 @@
                 <a:ea typeface="Ebrima"/>
                 <a:cs typeface="Ebrima"/>
               </a:rPr>
-              <a:t>ጌታችን ክንደብርቱ ነው (3x) የለም ሚገዳደረው አርሱ ብርቱ ነው ኢየሱስ አሸናፊ ነው (3x) ማነው የሚቋቋመው አሸናፊ ነው (2x)</a:t>
+              <a:t>ጌታችን ክንደብርቱ ነው 3x የለም ሚገዳደረው አርሱ ብርቱ ነው ኢየሱስ አሸናፊ ነው 3x ማነው የሚቋቋመው አሸናፊ ነው 2x</a:t>
             </a:r>
           </a:p>
         </p:txBody>
@@ -4280,7 +4280,7 @@
                 <a:ea typeface="Ebrima"/>
                 <a:cs typeface="Ebrima"/>
               </a:rPr>
-              <a:t>(2x)</a:t>
+              <a:t>2x</a:t>
             </a:r>
           </a:p>
         </p:txBody>
@@ -4347,7 +4347,7 @@
                 <a:ea typeface="Ebrima"/>
                 <a:cs typeface="Ebrima"/>
               </a:rPr>
-              <a:t>ጌታችን ክንደብርቱ ነው (3x) የለም ሚገዳደረው አርሱ ብርቱ ነው ኢየሱስ አሸናፊ ነው (3x) ማነው የሚቋቋመው አሸናፊ ነው (2x)</a:t>
+              <a:t>ጌታችን ክንደብርቱ ነው 3x የለም ሚገዳደረው አርሱ ብርቱ ነው ኢየሱስ አሸናፊ ነው 3x ማነው የሚቋቋመው አሸናፊ ነው 2x</a:t>
             </a:r>
           </a:p>
         </p:txBody>
@@ -4883,7 +4883,7 @@
                 <a:ea typeface="Ebrima"/>
                 <a:cs typeface="Ebrima"/>
               </a:rPr>
-              <a:t>(2x)</a:t>
+              <a:t>2x</a:t>
             </a:r>
           </a:p>
         </p:txBody>
@@ -5084,7 +5084,7 @@
                 <a:ea typeface="Ebrima"/>
                 <a:cs typeface="Ebrima"/>
               </a:rPr>
-              <a:t>(3x)</a:t>
+              <a:t>3x</a:t>
             </a:r>
           </a:p>
         </p:txBody>
@@ -5151,7 +5151,7 @@
                 <a:ea typeface="Ebrima"/>
                 <a:cs typeface="Ebrima"/>
               </a:rPr>
-              <a:t>ሌላ ምን ይሰጠዋል ለርሱ ይገባዋል (4x)</a:t>
+              <a:t>ሌላ ምን ይሰጠዋል ለርሱ ይገባዋል 4x</a:t>
             </a:r>
           </a:p>
         </p:txBody>
@@ -5486,7 +5486,7 @@
                 <a:ea typeface="Ebrima"/>
                 <a:cs typeface="Ebrima"/>
               </a:rPr>
-              <a:t>(2x)</a:t>
+              <a:t>2x</a:t>
             </a:r>
           </a:p>
         </p:txBody>
@@ -5553,7 +5553,7 @@
                 <a:ea typeface="Ebrima"/>
                 <a:cs typeface="Ebrima"/>
               </a:rPr>
-              <a:t>ጌታችን ክንደብርቱ ነው (3x) የለም ሚገዳደረው አርሱ ብርቱ ነው ኢየሱስ አሸናፊ ነው (3x) ማነው የሚቋቋመው አሸናፊ ነው (2x)</a:t>
+              <a:t>ጌታችን ክንደብርቱ ነው 3x የለም ሚገዳደረው አርሱ ብርቱ ነው ኢየሱስ አሸናፊ ነው 3x ማነው የሚቋቋመው አሸናፊ ነው 2x</a:t>
             </a:r>
           </a:p>
         </p:txBody>
